--- a/assets/pptx/catalog-83.pptx
+++ b/assets/pptx/catalog-83.pptx
@@ -3301,7 +3301,7 @@
                 <a:ea typeface="Ebrima"/>
                 <a:cs typeface="Ebrima"/>
               </a:rPr>
-              <a:t>እዳዬን ከኔ አስወገድከው (2)</a:t>
+              <a:t>እዳዬን ከኔ አስወገድከው 2</a:t>
             </a:r>
           </a:p>
         </p:txBody>
@@ -3368,7 +3368,7 @@
                 <a:ea typeface="Ebrima"/>
                 <a:cs typeface="Ebrima"/>
               </a:rPr>
-              <a:t>ቸር ነህ ለኔ ቸር ነህ (2x)</a:t>
+              <a:t>ቸር ነህ ለኔ ቸር ነህ 2x</a:t>
             </a:r>
           </a:p>
           <a:p>
@@ -3767,7 +3767,7 @@
                 <a:ea typeface="Ebrima"/>
                 <a:cs typeface="Ebrima"/>
               </a:rPr>
-              <a:t>እኔም ላክብረው ከልቤ (2x)</a:t>
+              <a:t>እኔም ላክብረው ከልቤ 2x</a:t>
             </a:r>
           </a:p>
         </p:txBody>
@@ -4009,7 +4009,7 @@
                 <a:ea typeface="Ebrima"/>
                 <a:cs typeface="Ebrima"/>
               </a:rPr>
-              <a:t>ብዙ ብዙ ነው ይቅርታህም ብዙ ነው(2)</a:t>
+              <a:t>ብዙ ብዙ ነው ይቅርታህም ብዙ ነው2</a:t>
             </a:r>
           </a:p>
         </p:txBody>
